--- a/presentation/DL070_BarlowTwins_Presentation.pptx
+++ b/presentation/DL070_BarlowTwins_Presentation.pptx
@@ -3947,7 +3947,7 @@
               </a:defRPr>
             </a:pPr>
             <a:r>
-              <a:t>5. Complete Artifact Integrity: All code, unit tests, raw JSON metrics, Colab notebook, and IEEE report are verified, cryptographically hashed, and fully reproducible.</a:t>
+              <a:t>5. Public Repository &amp; Artifacts: https://github.com/khageshranjan23-pixel/dl070-barlow-twins-cifar10-24cs2021 - code, unit tests, Colab notebook, and IEEE report fully verified.</a:t>
             </a:r>
           </a:p>
         </p:txBody>
